--- a/figs/Presentation1.pptx
+++ b/figs/Presentation1.pptx
@@ -6,6 +6,8 @@
   </p:sldMasterIdLst>
   <p:sldIdLst>
     <p:sldId id="256" r:id="rId2"/>
+    <p:sldId id="257" r:id="rId3"/>
+    <p:sldId id="258" r:id="rId4"/>
   </p:sldIdLst>
   <p:sldSz cx="12192000" cy="6858000"/>
   <p:notesSz cx="6858000" cy="9144000"/>
@@ -104,6 +106,11 @@
       </a:defRPr>
     </a:lvl9pPr>
   </p:defaultTextStyle>
+  <p:extLst>
+    <p:ext uri="{EFAFB233-063F-42B5-8137-9DF3F51BA10A}">
+      <p15:sldGuideLst xmlns:p15="http://schemas.microsoft.com/office/powerpoint/2012/main"/>
+    </p:ext>
+  </p:extLst>
 </p:presentation>
 </file>
 
@@ -254,7 +261,7 @@
           <a:p>
             <a:fld id="{937769BE-1323-48BB-BE5B-CA70265BAB46}" type="datetimeFigureOut">
               <a:rPr lang="en-US" smtClean="0"/>
-              <a:t>9/23/2026</a:t>
+              <a:t>10/2/2026</a:t>
             </a:fld>
             <a:endParaRPr lang="en-US"/>
           </a:p>
@@ -452,7 +459,7 @@
           <a:p>
             <a:fld id="{937769BE-1323-48BB-BE5B-CA70265BAB46}" type="datetimeFigureOut">
               <a:rPr lang="en-US" smtClean="0"/>
-              <a:t>9/23/2026</a:t>
+              <a:t>10/2/2026</a:t>
             </a:fld>
             <a:endParaRPr lang="en-US"/>
           </a:p>
@@ -660,7 +667,7 @@
           <a:p>
             <a:fld id="{937769BE-1323-48BB-BE5B-CA70265BAB46}" type="datetimeFigureOut">
               <a:rPr lang="en-US" smtClean="0"/>
-              <a:t>9/23/2026</a:t>
+              <a:t>10/2/2026</a:t>
             </a:fld>
             <a:endParaRPr lang="en-US"/>
           </a:p>
@@ -858,7 +865,7 @@
           <a:p>
             <a:fld id="{937769BE-1323-48BB-BE5B-CA70265BAB46}" type="datetimeFigureOut">
               <a:rPr lang="en-US" smtClean="0"/>
-              <a:t>9/23/2026</a:t>
+              <a:t>10/2/2026</a:t>
             </a:fld>
             <a:endParaRPr lang="en-US"/>
           </a:p>
@@ -1133,7 +1140,7 @@
           <a:p>
             <a:fld id="{937769BE-1323-48BB-BE5B-CA70265BAB46}" type="datetimeFigureOut">
               <a:rPr lang="en-US" smtClean="0"/>
-              <a:t>9/23/2026</a:t>
+              <a:t>10/2/2026</a:t>
             </a:fld>
             <a:endParaRPr lang="en-US"/>
           </a:p>
@@ -1398,7 +1405,7 @@
           <a:p>
             <a:fld id="{937769BE-1323-48BB-BE5B-CA70265BAB46}" type="datetimeFigureOut">
               <a:rPr lang="en-US" smtClean="0"/>
-              <a:t>9/23/2026</a:t>
+              <a:t>10/2/2026</a:t>
             </a:fld>
             <a:endParaRPr lang="en-US"/>
           </a:p>
@@ -1810,7 +1817,7 @@
           <a:p>
             <a:fld id="{937769BE-1323-48BB-BE5B-CA70265BAB46}" type="datetimeFigureOut">
               <a:rPr lang="en-US" smtClean="0"/>
-              <a:t>9/23/2026</a:t>
+              <a:t>10/2/2026</a:t>
             </a:fld>
             <a:endParaRPr lang="en-US"/>
           </a:p>
@@ -1951,7 +1958,7 @@
           <a:p>
             <a:fld id="{937769BE-1323-48BB-BE5B-CA70265BAB46}" type="datetimeFigureOut">
               <a:rPr lang="en-US" smtClean="0"/>
-              <a:t>9/23/2026</a:t>
+              <a:t>10/2/2026</a:t>
             </a:fld>
             <a:endParaRPr lang="en-US"/>
           </a:p>
@@ -2064,7 +2071,7 @@
           <a:p>
             <a:fld id="{937769BE-1323-48BB-BE5B-CA70265BAB46}" type="datetimeFigureOut">
               <a:rPr lang="en-US" smtClean="0"/>
-              <a:t>9/23/2026</a:t>
+              <a:t>10/2/2026</a:t>
             </a:fld>
             <a:endParaRPr lang="en-US"/>
           </a:p>
@@ -2375,7 +2382,7 @@
           <a:p>
             <a:fld id="{937769BE-1323-48BB-BE5B-CA70265BAB46}" type="datetimeFigureOut">
               <a:rPr lang="en-US" smtClean="0"/>
-              <a:t>9/23/2026</a:t>
+              <a:t>10/2/2026</a:t>
             </a:fld>
             <a:endParaRPr lang="en-US"/>
           </a:p>
@@ -2663,7 +2670,7 @@
           <a:p>
             <a:fld id="{937769BE-1323-48BB-BE5B-CA70265BAB46}" type="datetimeFigureOut">
               <a:rPr lang="en-US" smtClean="0"/>
-              <a:t>9/23/2026</a:t>
+              <a:t>10/2/2026</a:t>
             </a:fld>
             <a:endParaRPr lang="en-US"/>
           </a:p>
@@ -2904,7 +2911,7 @@
           <a:p>
             <a:fld id="{937769BE-1323-48BB-BE5B-CA70265BAB46}" type="datetimeFigureOut">
               <a:rPr lang="en-US" smtClean="0"/>
-              <a:t>9/23/2026</a:t>
+              <a:t>10/2/2026</a:t>
             </a:fld>
             <a:endParaRPr lang="en-US"/>
           </a:p>
@@ -3396,6 +3403,235 @@
 </p:sld>
 </file>
 
+<file path=ppt/slides/slide2.xml><?xml version="1.0" encoding="utf-8"?>
+<p:sld xmlns:a="http://schemas.openxmlformats.org/drawingml/2006/main" xmlns:r="http://schemas.openxmlformats.org/officeDocument/2006/relationships" xmlns:p="http://schemas.openxmlformats.org/presentationml/2006/main">
+  <p:cSld>
+    <p:spTree>
+      <p:nvGrpSpPr>
+        <p:cNvPr id="1" name=""/>
+        <p:cNvGrpSpPr/>
+        <p:nvPr/>
+      </p:nvGrpSpPr>
+      <p:grpSpPr>
+        <a:xfrm>
+          <a:off x="0" y="0"/>
+          <a:ext cx="0" cy="0"/>
+          <a:chOff x="0" y="0"/>
+          <a:chExt cx="0" cy="0"/>
+        </a:xfrm>
+      </p:grpSpPr>
+      <p:grpSp>
+        <p:nvGrpSpPr>
+          <p:cNvPr id="10" name="Group 9">
+            <a:extLst>
+              <a:ext uri="{FF2B5EF4-FFF2-40B4-BE49-F238E27FC236}">
+                <a16:creationId xmlns:a16="http://schemas.microsoft.com/office/drawing/2014/main" id="{31142FDB-60D3-8519-C7EE-EE53077BE9AF}"/>
+              </a:ext>
+            </a:extLst>
+          </p:cNvPr>
+          <p:cNvGrpSpPr/>
+          <p:nvPr/>
+        </p:nvGrpSpPr>
+        <p:grpSpPr>
+          <a:xfrm>
+            <a:off x="176213" y="800098"/>
+            <a:ext cx="8396286" cy="5257804"/>
+            <a:chOff x="176213" y="800098"/>
+            <a:chExt cx="8396286" cy="5257804"/>
+          </a:xfrm>
+        </p:grpSpPr>
+        <p:pic>
+          <p:nvPicPr>
+            <p:cNvPr id="5" name="Picture 4">
+              <a:extLst>
+                <a:ext uri="{FF2B5EF4-FFF2-40B4-BE49-F238E27FC236}">
+                  <a16:creationId xmlns:a16="http://schemas.microsoft.com/office/drawing/2014/main" id="{3522DD8D-21D1-EB63-D5B9-929FEC33AD8E}"/>
+                </a:ext>
+              </a:extLst>
+            </p:cNvPr>
+            <p:cNvPicPr>
+              <a:picLocks noChangeAspect="1"/>
+            </p:cNvPicPr>
+            <p:nvPr/>
+          </p:nvPicPr>
+          <p:blipFill>
+            <a:blip r:embed="rId2">
+              <a:extLst>
+                <a:ext uri="{28A0092B-C50C-407E-A947-70E740481C1C}">
+                  <a14:useLocalDpi xmlns:a14="http://schemas.microsoft.com/office/drawing/2010/main" val="0"/>
+                </a:ext>
+              </a:extLst>
+            </a:blip>
+            <a:srcRect t="12500" r="50219" b="11666"/>
+            <a:stretch>
+              <a:fillRect/>
+            </a:stretch>
+          </p:blipFill>
+          <p:spPr>
+            <a:xfrm>
+              <a:off x="303276" y="857249"/>
+              <a:ext cx="3982974" cy="5200653"/>
+            </a:xfrm>
+            <a:prstGeom prst="rect">
+              <a:avLst/>
+            </a:prstGeom>
+          </p:spPr>
+        </p:pic>
+        <p:pic>
+          <p:nvPicPr>
+            <p:cNvPr id="7" name="Picture 6">
+              <a:extLst>
+                <a:ext uri="{FF2B5EF4-FFF2-40B4-BE49-F238E27FC236}">
+                  <a16:creationId xmlns:a16="http://schemas.microsoft.com/office/drawing/2014/main" id="{DD8C3C43-B08A-9CF2-C5EB-16A8E252422D}"/>
+                </a:ext>
+              </a:extLst>
+            </p:cNvPr>
+            <p:cNvPicPr>
+              <a:picLocks noChangeAspect="1"/>
+            </p:cNvPicPr>
+            <p:nvPr/>
+          </p:nvPicPr>
+          <p:blipFill>
+            <a:blip r:embed="rId2">
+              <a:extLst>
+                <a:ext uri="{28A0092B-C50C-407E-A947-70E740481C1C}">
+                  <a14:useLocalDpi xmlns:a14="http://schemas.microsoft.com/office/drawing/2010/main" val="0"/>
+                </a:ext>
+              </a:extLst>
+            </a:blip>
+            <a:srcRect l="49167" t="12639" b="11528"/>
+            <a:stretch>
+              <a:fillRect/>
+            </a:stretch>
+          </p:blipFill>
+          <p:spPr>
+            <a:xfrm>
+              <a:off x="4505324" y="857249"/>
+              <a:ext cx="4067175" cy="5200653"/>
+            </a:xfrm>
+            <a:prstGeom prst="rect">
+              <a:avLst/>
+            </a:prstGeom>
+          </p:spPr>
+        </p:pic>
+        <p:pic>
+          <p:nvPicPr>
+            <p:cNvPr id="9" name="Picture 8">
+              <a:extLst>
+                <a:ext uri="{FF2B5EF4-FFF2-40B4-BE49-F238E27FC236}">
+                  <a16:creationId xmlns:a16="http://schemas.microsoft.com/office/drawing/2014/main" id="{64BF80C2-D7B4-8C2D-C34C-BFD0A97C27CA}"/>
+                </a:ext>
+              </a:extLst>
+            </p:cNvPr>
+            <p:cNvPicPr>
+              <a:picLocks noChangeAspect="1"/>
+            </p:cNvPicPr>
+            <p:nvPr/>
+          </p:nvPicPr>
+          <p:blipFill>
+            <a:blip r:embed="rId2">
+              <a:extLst>
+                <a:ext uri="{28A0092B-C50C-407E-A947-70E740481C1C}">
+                  <a14:useLocalDpi xmlns:a14="http://schemas.microsoft.com/office/drawing/2010/main" val="0"/>
+                </a:ext>
+              </a:extLst>
+            </a:blip>
+            <a:srcRect l="-2738" r="1" b="93611"/>
+            <a:stretch>
+              <a:fillRect/>
+            </a:stretch>
+          </p:blipFill>
+          <p:spPr>
+            <a:xfrm>
+              <a:off x="176213" y="800098"/>
+              <a:ext cx="8220074" cy="438150"/>
+            </a:xfrm>
+            <a:prstGeom prst="rect">
+              <a:avLst/>
+            </a:prstGeom>
+          </p:spPr>
+        </p:pic>
+      </p:grpSp>
+    </p:spTree>
+    <p:extLst>
+      <p:ext uri="{BB962C8B-B14F-4D97-AF65-F5344CB8AC3E}">
+        <p14:creationId xmlns:p14="http://schemas.microsoft.com/office/powerpoint/2010/main" val="2595883910"/>
+      </p:ext>
+    </p:extLst>
+  </p:cSld>
+  <p:clrMapOvr>
+    <a:masterClrMapping/>
+  </p:clrMapOvr>
+</p:sld>
+</file>
+
+<file path=ppt/slides/slide3.xml><?xml version="1.0" encoding="utf-8"?>
+<p:sld xmlns:a="http://schemas.openxmlformats.org/drawingml/2006/main" xmlns:r="http://schemas.openxmlformats.org/officeDocument/2006/relationships" xmlns:p="http://schemas.openxmlformats.org/presentationml/2006/main">
+  <p:cSld>
+    <p:spTree>
+      <p:nvGrpSpPr>
+        <p:cNvPr id="1" name=""/>
+        <p:cNvGrpSpPr/>
+        <p:nvPr/>
+      </p:nvGrpSpPr>
+      <p:grpSpPr>
+        <a:xfrm>
+          <a:off x="0" y="0"/>
+          <a:ext cx="0" cy="0"/>
+          <a:chOff x="0" y="0"/>
+          <a:chExt cx="0" cy="0"/>
+        </a:xfrm>
+      </p:grpSpPr>
+      <p:pic>
+        <p:nvPicPr>
+          <p:cNvPr id="5" name="Picture 4">
+            <a:extLst>
+              <a:ext uri="{FF2B5EF4-FFF2-40B4-BE49-F238E27FC236}">
+                <a16:creationId xmlns:a16="http://schemas.microsoft.com/office/drawing/2014/main" id="{109A25FD-CB64-0C3B-8F72-679BFA894F98}"/>
+              </a:ext>
+            </a:extLst>
+          </p:cNvPr>
+          <p:cNvPicPr>
+            <a:picLocks noChangeAspect="1"/>
+          </p:cNvPicPr>
+          <p:nvPr/>
+        </p:nvPicPr>
+        <p:blipFill>
+          <a:blip r:embed="rId2">
+            <a:extLst>
+              <a:ext uri="{28A0092B-C50C-407E-A947-70E740481C1C}">
+                <a14:useLocalDpi xmlns:a14="http://schemas.microsoft.com/office/drawing/2010/main" val="0"/>
+              </a:ext>
+            </a:extLst>
+          </a:blip>
+          <a:srcRect l="-2738" r="1" b="93611"/>
+          <a:stretch>
+            <a:fillRect/>
+          </a:stretch>
+        </p:blipFill>
+        <p:spPr>
+          <a:xfrm>
+            <a:off x="1695451" y="1285875"/>
+            <a:ext cx="8220074" cy="438150"/>
+          </a:xfrm>
+          <a:prstGeom prst="rect">
+            <a:avLst/>
+          </a:prstGeom>
+        </p:spPr>
+      </p:pic>
+    </p:spTree>
+    <p:extLst>
+      <p:ext uri="{BB962C8B-B14F-4D97-AF65-F5344CB8AC3E}">
+        <p14:creationId xmlns:p14="http://schemas.microsoft.com/office/powerpoint/2010/main" val="1703997101"/>
+      </p:ext>
+    </p:extLst>
+  </p:cSld>
+  <p:clrMapOvr>
+    <a:masterClrMapping/>
+  </p:clrMapOvr>
+</p:sld>
+</file>
+
 <file path=ppt/theme/theme1.xml><?xml version="1.0" encoding="utf-8"?>
 <a:theme xmlns:a="http://schemas.openxmlformats.org/drawingml/2006/main" name="Office Theme">
   <a:themeElements>
